--- a/ゲーム科2年/01_後期/ゲームプログラミング応用Ⅰ/00_シェーダーの基礎.pptx
+++ b/ゲーム科2年/01_後期/ゲームプログラミング応用Ⅰ/00_シェーダーの基礎.pptx
@@ -270,7 +270,7 @@
           <a:p>
             <a:fld id="{E9CC885B-4903-4D54-9A93-00025F12DED9}" type="datetimeFigureOut">
               <a:rPr kumimoji="1" lang="ja-JP" altLang="en-US" smtClean="0"/>
-              <a:t>2025/7/15</a:t>
+              <a:t>2025/7/17</a:t>
             </a:fld>
             <a:endParaRPr kumimoji="1" lang="ja-JP" altLang="en-US"/>
           </a:p>
@@ -500,7 +500,7 @@
           <a:p>
             <a:fld id="{E9CC885B-4903-4D54-9A93-00025F12DED9}" type="datetimeFigureOut">
               <a:rPr kumimoji="1" lang="ja-JP" altLang="en-US" smtClean="0"/>
-              <a:t>2025/7/15</a:t>
+              <a:t>2025/7/17</a:t>
             </a:fld>
             <a:endParaRPr kumimoji="1" lang="ja-JP" altLang="en-US"/>
           </a:p>
@@ -740,7 +740,7 @@
           <a:p>
             <a:fld id="{E9CC885B-4903-4D54-9A93-00025F12DED9}" type="datetimeFigureOut">
               <a:rPr kumimoji="1" lang="ja-JP" altLang="en-US" smtClean="0"/>
-              <a:t>2025/7/15</a:t>
+              <a:t>2025/7/17</a:t>
             </a:fld>
             <a:endParaRPr kumimoji="1" lang="ja-JP" altLang="en-US"/>
           </a:p>
@@ -970,7 +970,7 @@
           <a:p>
             <a:fld id="{E9CC885B-4903-4D54-9A93-00025F12DED9}" type="datetimeFigureOut">
               <a:rPr kumimoji="1" lang="ja-JP" altLang="en-US" smtClean="0"/>
-              <a:t>2025/7/15</a:t>
+              <a:t>2025/7/17</a:t>
             </a:fld>
             <a:endParaRPr kumimoji="1" lang="ja-JP" altLang="en-US"/>
           </a:p>
@@ -1245,7 +1245,7 @@
           <a:p>
             <a:fld id="{E9CC885B-4903-4D54-9A93-00025F12DED9}" type="datetimeFigureOut">
               <a:rPr kumimoji="1" lang="ja-JP" altLang="en-US" smtClean="0"/>
-              <a:t>2025/7/15</a:t>
+              <a:t>2025/7/17</a:t>
             </a:fld>
             <a:endParaRPr kumimoji="1" lang="ja-JP" altLang="en-US"/>
           </a:p>
@@ -1574,7 +1574,7 @@
           <a:p>
             <a:fld id="{E9CC885B-4903-4D54-9A93-00025F12DED9}" type="datetimeFigureOut">
               <a:rPr kumimoji="1" lang="ja-JP" altLang="en-US" smtClean="0"/>
-              <a:t>2025/7/15</a:t>
+              <a:t>2025/7/17</a:t>
             </a:fld>
             <a:endParaRPr kumimoji="1" lang="ja-JP" altLang="en-US"/>
           </a:p>
@@ -2050,7 +2050,7 @@
           <a:p>
             <a:fld id="{E9CC885B-4903-4D54-9A93-00025F12DED9}" type="datetimeFigureOut">
               <a:rPr kumimoji="1" lang="ja-JP" altLang="en-US" smtClean="0"/>
-              <a:t>2025/7/15</a:t>
+              <a:t>2025/7/17</a:t>
             </a:fld>
             <a:endParaRPr kumimoji="1" lang="ja-JP" altLang="en-US"/>
           </a:p>
@@ -2191,7 +2191,7 @@
           <a:p>
             <a:fld id="{E9CC885B-4903-4D54-9A93-00025F12DED9}" type="datetimeFigureOut">
               <a:rPr kumimoji="1" lang="ja-JP" altLang="en-US" smtClean="0"/>
-              <a:t>2025/7/15</a:t>
+              <a:t>2025/7/17</a:t>
             </a:fld>
             <a:endParaRPr kumimoji="1" lang="ja-JP" altLang="en-US"/>
           </a:p>
@@ -2304,7 +2304,7 @@
           <a:p>
             <a:fld id="{E9CC885B-4903-4D54-9A93-00025F12DED9}" type="datetimeFigureOut">
               <a:rPr kumimoji="1" lang="ja-JP" altLang="en-US" smtClean="0"/>
-              <a:t>2025/7/15</a:t>
+              <a:t>2025/7/17</a:t>
             </a:fld>
             <a:endParaRPr kumimoji="1" lang="ja-JP" altLang="en-US"/>
           </a:p>
@@ -2647,7 +2647,7 @@
           <a:p>
             <a:fld id="{E9CC885B-4903-4D54-9A93-00025F12DED9}" type="datetimeFigureOut">
               <a:rPr kumimoji="1" lang="ja-JP" altLang="en-US" smtClean="0"/>
-              <a:t>2025/7/15</a:t>
+              <a:t>2025/7/17</a:t>
             </a:fld>
             <a:endParaRPr kumimoji="1" lang="ja-JP" altLang="en-US"/>
           </a:p>
@@ -2935,7 +2935,7 @@
           <a:p>
             <a:fld id="{E9CC885B-4903-4D54-9A93-00025F12DED9}" type="datetimeFigureOut">
               <a:rPr kumimoji="1" lang="ja-JP" altLang="en-US" smtClean="0"/>
-              <a:t>2025/7/15</a:t>
+              <a:t>2025/7/17</a:t>
             </a:fld>
             <a:endParaRPr kumimoji="1" lang="ja-JP" altLang="en-US"/>
           </a:p>
@@ -3208,7 +3208,7 @@
           <a:p>
             <a:fld id="{E9CC885B-4903-4D54-9A93-00025F12DED9}" type="datetimeFigureOut">
               <a:rPr kumimoji="1" lang="ja-JP" altLang="en-US" smtClean="0"/>
-              <a:t>2025/7/15</a:t>
+              <a:t>2025/7/17</a:t>
             </a:fld>
             <a:endParaRPr kumimoji="1" lang="ja-JP" altLang="en-US"/>
           </a:p>
@@ -4246,7 +4246,7 @@
         <p:spPr>
           <a:xfrm>
             <a:off x="567542" y="1216429"/>
-            <a:ext cx="11464998" cy="5262979"/>
+            <a:ext cx="11264622" cy="3785652"/>
           </a:xfrm>
           <a:prstGeom prst="rect">
             <a:avLst/>
@@ -4369,78 +4369,6 @@
               <a:t>この２つについて学習します。</a:t>
             </a:r>
             <a:endParaRPr kumimoji="1" lang="en-US" altLang="ja-JP" sz="2400" dirty="0"/>
-          </a:p>
-          <a:p>
-            <a:endParaRPr lang="en-US" altLang="ja-JP" sz="2400" dirty="0"/>
-          </a:p>
-          <a:p>
-            <a:r>
-              <a:rPr kumimoji="1" lang="en-US" altLang="ja-JP" sz="2400" b="1" dirty="0">
-                <a:solidFill>
-                  <a:srgbClr val="00B050"/>
-                </a:solidFill>
-              </a:rPr>
-              <a:t>※</a:t>
-            </a:r>
-            <a:r>
-              <a:rPr kumimoji="1" lang="ja-JP" altLang="en-US" sz="2400" b="1" dirty="0">
-                <a:solidFill>
-                  <a:srgbClr val="00B050"/>
-                </a:solidFill>
-              </a:rPr>
-              <a:t>ジオメトリシェーダーは</a:t>
-            </a:r>
-            <a:r>
-              <a:rPr kumimoji="1" lang="en-US" altLang="ja-JP" sz="2400" b="1" dirty="0" err="1">
-                <a:solidFill>
-                  <a:srgbClr val="00B050"/>
-                </a:solidFill>
-              </a:rPr>
-              <a:t>DxLib</a:t>
-            </a:r>
-            <a:r>
-              <a:rPr kumimoji="1" lang="ja-JP" altLang="en-US" sz="2400" b="1" dirty="0">
-                <a:solidFill>
-                  <a:srgbClr val="00B050"/>
-                </a:solidFill>
-              </a:rPr>
-              <a:t>の仕様で作れません。</a:t>
-            </a:r>
-            <a:endParaRPr kumimoji="1" lang="en-US" altLang="ja-JP" sz="2400" b="1" dirty="0">
-              <a:solidFill>
-                <a:srgbClr val="00B050"/>
-              </a:solidFill>
-            </a:endParaRPr>
-          </a:p>
-          <a:p>
-            <a:r>
-              <a:rPr lang="ja-JP" altLang="en-US" sz="2400" b="1" dirty="0">
-                <a:solidFill>
-                  <a:srgbClr val="00B050"/>
-                </a:solidFill>
-              </a:rPr>
-              <a:t>　興味がある方はゲームエンジンで挑戦してみてください。</a:t>
-            </a:r>
-            <a:endParaRPr lang="en-US" altLang="ja-JP" sz="2400" b="1" dirty="0">
-              <a:solidFill>
-                <a:srgbClr val="00B050"/>
-              </a:solidFill>
-            </a:endParaRPr>
-          </a:p>
-          <a:p>
-            <a:r>
-              <a:rPr lang="ja-JP" altLang="en-US" sz="2400" b="1" dirty="0">
-                <a:solidFill>
-                  <a:srgbClr val="00B050"/>
-                </a:solidFill>
-              </a:rPr>
-              <a:t>　モデルのアウトラインやファーの毛など作れて楽しいです。</a:t>
-            </a:r>
-            <a:endParaRPr lang="en-US" altLang="ja-JP" sz="2400" b="1" dirty="0">
-              <a:solidFill>
-                <a:srgbClr val="00B050"/>
-              </a:solidFill>
-            </a:endParaRPr>
           </a:p>
           <a:p>
             <a:endParaRPr kumimoji="1" lang="en-US" altLang="ja-JP" sz="2400" b="1" dirty="0">

--- a/ゲーム科2年/01_後期/ゲームプログラミング応用Ⅰ/00_シェーダーの基礎.pptx
+++ b/ゲーム科2年/01_後期/ゲームプログラミング応用Ⅰ/00_シェーダーの基礎.pptx
@@ -270,7 +270,7 @@
           <a:p>
             <a:fld id="{E9CC885B-4903-4D54-9A93-00025F12DED9}" type="datetimeFigureOut">
               <a:rPr kumimoji="1" lang="ja-JP" altLang="en-US" smtClean="0"/>
-              <a:t>2025/7/17</a:t>
+              <a:t>2025/7/25</a:t>
             </a:fld>
             <a:endParaRPr kumimoji="1" lang="ja-JP" altLang="en-US"/>
           </a:p>
@@ -500,7 +500,7 @@
           <a:p>
             <a:fld id="{E9CC885B-4903-4D54-9A93-00025F12DED9}" type="datetimeFigureOut">
               <a:rPr kumimoji="1" lang="ja-JP" altLang="en-US" smtClean="0"/>
-              <a:t>2025/7/17</a:t>
+              <a:t>2025/7/25</a:t>
             </a:fld>
             <a:endParaRPr kumimoji="1" lang="ja-JP" altLang="en-US"/>
           </a:p>
@@ -740,7 +740,7 @@
           <a:p>
             <a:fld id="{E9CC885B-4903-4D54-9A93-00025F12DED9}" type="datetimeFigureOut">
               <a:rPr kumimoji="1" lang="ja-JP" altLang="en-US" smtClean="0"/>
-              <a:t>2025/7/17</a:t>
+              <a:t>2025/7/25</a:t>
             </a:fld>
             <a:endParaRPr kumimoji="1" lang="ja-JP" altLang="en-US"/>
           </a:p>
@@ -970,7 +970,7 @@
           <a:p>
             <a:fld id="{E9CC885B-4903-4D54-9A93-00025F12DED9}" type="datetimeFigureOut">
               <a:rPr kumimoji="1" lang="ja-JP" altLang="en-US" smtClean="0"/>
-              <a:t>2025/7/17</a:t>
+              <a:t>2025/7/25</a:t>
             </a:fld>
             <a:endParaRPr kumimoji="1" lang="ja-JP" altLang="en-US"/>
           </a:p>
@@ -1245,7 +1245,7 @@
           <a:p>
             <a:fld id="{E9CC885B-4903-4D54-9A93-00025F12DED9}" type="datetimeFigureOut">
               <a:rPr kumimoji="1" lang="ja-JP" altLang="en-US" smtClean="0"/>
-              <a:t>2025/7/17</a:t>
+              <a:t>2025/7/25</a:t>
             </a:fld>
             <a:endParaRPr kumimoji="1" lang="ja-JP" altLang="en-US"/>
           </a:p>
@@ -1574,7 +1574,7 @@
           <a:p>
             <a:fld id="{E9CC885B-4903-4D54-9A93-00025F12DED9}" type="datetimeFigureOut">
               <a:rPr kumimoji="1" lang="ja-JP" altLang="en-US" smtClean="0"/>
-              <a:t>2025/7/17</a:t>
+              <a:t>2025/7/25</a:t>
             </a:fld>
             <a:endParaRPr kumimoji="1" lang="ja-JP" altLang="en-US"/>
           </a:p>
@@ -2050,7 +2050,7 @@
           <a:p>
             <a:fld id="{E9CC885B-4903-4D54-9A93-00025F12DED9}" type="datetimeFigureOut">
               <a:rPr kumimoji="1" lang="ja-JP" altLang="en-US" smtClean="0"/>
-              <a:t>2025/7/17</a:t>
+              <a:t>2025/7/25</a:t>
             </a:fld>
             <a:endParaRPr kumimoji="1" lang="ja-JP" altLang="en-US"/>
           </a:p>
@@ -2191,7 +2191,7 @@
           <a:p>
             <a:fld id="{E9CC885B-4903-4D54-9A93-00025F12DED9}" type="datetimeFigureOut">
               <a:rPr kumimoji="1" lang="ja-JP" altLang="en-US" smtClean="0"/>
-              <a:t>2025/7/17</a:t>
+              <a:t>2025/7/25</a:t>
             </a:fld>
             <a:endParaRPr kumimoji="1" lang="ja-JP" altLang="en-US"/>
           </a:p>
@@ -2304,7 +2304,7 @@
           <a:p>
             <a:fld id="{E9CC885B-4903-4D54-9A93-00025F12DED9}" type="datetimeFigureOut">
               <a:rPr kumimoji="1" lang="ja-JP" altLang="en-US" smtClean="0"/>
-              <a:t>2025/7/17</a:t>
+              <a:t>2025/7/25</a:t>
             </a:fld>
             <a:endParaRPr kumimoji="1" lang="ja-JP" altLang="en-US"/>
           </a:p>
@@ -2647,7 +2647,7 @@
           <a:p>
             <a:fld id="{E9CC885B-4903-4D54-9A93-00025F12DED9}" type="datetimeFigureOut">
               <a:rPr kumimoji="1" lang="ja-JP" altLang="en-US" smtClean="0"/>
-              <a:t>2025/7/17</a:t>
+              <a:t>2025/7/25</a:t>
             </a:fld>
             <a:endParaRPr kumimoji="1" lang="ja-JP" altLang="en-US"/>
           </a:p>
@@ -2935,7 +2935,7 @@
           <a:p>
             <a:fld id="{E9CC885B-4903-4D54-9A93-00025F12DED9}" type="datetimeFigureOut">
               <a:rPr kumimoji="1" lang="ja-JP" altLang="en-US" smtClean="0"/>
-              <a:t>2025/7/17</a:t>
+              <a:t>2025/7/25</a:t>
             </a:fld>
             <a:endParaRPr kumimoji="1" lang="ja-JP" altLang="en-US"/>
           </a:p>
@@ -3208,7 +3208,7 @@
           <a:p>
             <a:fld id="{E9CC885B-4903-4D54-9A93-00025F12DED9}" type="datetimeFigureOut">
               <a:rPr kumimoji="1" lang="ja-JP" altLang="en-US" smtClean="0"/>
-              <a:t>2025/7/17</a:t>
+              <a:t>2025/7/25</a:t>
             </a:fld>
             <a:endParaRPr kumimoji="1" lang="ja-JP" altLang="en-US"/>
           </a:p>
@@ -3899,14 +3899,14 @@
           <a:p>
             <a:r>
               <a:rPr lang="ja-JP" altLang="en-US" sz="2400" dirty="0"/>
-              <a:t>　・半透明処理。後ろ側にある物体の色も反映させる。</a:t>
+              <a:t>　・アルファは半透明処理。後ろ側にある物体の色も反映させる。</a:t>
             </a:r>
             <a:endParaRPr lang="en-US" altLang="ja-JP" sz="2400" dirty="0"/>
           </a:p>
           <a:p>
             <a:r>
               <a:rPr lang="ja-JP" altLang="en-US" sz="2400" dirty="0"/>
-              <a:t>　　ブレンディングは透明でなくても、重なっている部分を合成すること。</a:t>
+              <a:t>　　ブレンディングは重なっている部分の色を合成すること。</a:t>
             </a:r>
             <a:endParaRPr lang="en-US" altLang="ja-JP" sz="2400" dirty="0"/>
           </a:p>
@@ -4246,7 +4246,7 @@
         <p:spPr>
           <a:xfrm>
             <a:off x="567542" y="1216429"/>
-            <a:ext cx="11264622" cy="3785652"/>
+            <a:ext cx="11264622" cy="4154984"/>
           </a:xfrm>
           <a:prstGeom prst="rect">
             <a:avLst/>
@@ -4400,7 +4400,7 @@
                   <a:srgbClr val="00B050"/>
                 </a:solidFill>
               </a:rPr>
-              <a:t>DirectX</a:t>
+              <a:t>Unity</a:t>
             </a:r>
             <a:r>
               <a:rPr lang="ja-JP" altLang="en-US" sz="2400" b="1" dirty="0">
@@ -4408,7 +4408,38 @@
                   <a:srgbClr val="00B050"/>
                 </a:solidFill>
               </a:rPr>
-              <a:t>など、エンジンやライブラリに任せるのが主流です</a:t>
+              <a:t>や</a:t>
+            </a:r>
+            <a:r>
+              <a:rPr lang="en-US" altLang="ja-JP" sz="2400" b="1" dirty="0">
+                <a:solidFill>
+                  <a:srgbClr val="00B050"/>
+                </a:solidFill>
+              </a:rPr>
+              <a:t>DirectX</a:t>
+            </a:r>
+            <a:r>
+              <a:rPr lang="ja-JP" altLang="en-US" sz="2400" b="1" dirty="0">
+                <a:solidFill>
+                  <a:srgbClr val="00B050"/>
+                </a:solidFill>
+              </a:rPr>
+              <a:t>など、</a:t>
+            </a:r>
+            <a:endParaRPr lang="en-US" altLang="ja-JP" sz="2400" b="1" dirty="0">
+              <a:solidFill>
+                <a:srgbClr val="00B050"/>
+              </a:solidFill>
+            </a:endParaRPr>
+          </a:p>
+          <a:p>
+            <a:r>
+              <a:rPr lang="ja-JP" altLang="en-US" sz="2400" b="1" dirty="0">
+                <a:solidFill>
+                  <a:srgbClr val="00B050"/>
+                </a:solidFill>
+              </a:rPr>
+              <a:t>　エンジンやライブラリに任せるのが主流です</a:t>
             </a:r>
             <a:endParaRPr kumimoji="1" lang="en-US" altLang="ja-JP" sz="2400" b="1" dirty="0">
               <a:solidFill>
@@ -5388,7 +5419,7 @@
           <a:p>
             <a:r>
               <a:rPr lang="ja-JP" altLang="en-US" sz="2400" dirty="0"/>
-              <a:t>形状と陰影が確定したら、いよいよ</a:t>
+              <a:t>形状と陰影が確定したら、</a:t>
             </a:r>
             <a:r>
               <a:rPr lang="ja-JP" altLang="en-US" sz="2400" b="1" dirty="0">
@@ -5418,7 +5449,7 @@
                   <a:srgbClr val="FF0000"/>
                 </a:solidFill>
               </a:rPr>
-              <a:t>裏面やほかの画像で隠れている部分は見えないように</a:t>
+              <a:t>裏面や、ほかの画像で隠れている部分は見えないように</a:t>
             </a:r>
             <a:r>
               <a:rPr kumimoji="1" lang="ja-JP" altLang="en-US" sz="2400" dirty="0"/>
@@ -5693,11 +5724,7 @@
                   <a:srgbClr val="FF0000"/>
                 </a:solidFill>
               </a:rPr>
-              <a:t>色を付けていきます。</a:t>
-            </a:r>
-            <a:r>
-              <a:rPr lang="ja-JP" altLang="en-US" sz="2400" dirty="0"/>
-              <a:t>（まだ色は塗りません）</a:t>
+              <a:t>この後に色を付けていきます。</a:t>
             </a:r>
             <a:endParaRPr lang="en-US" altLang="ja-JP" sz="2400" dirty="0"/>
           </a:p>

--- a/ゲーム科2年/01_後期/ゲームプログラミング応用Ⅰ/00_シェーダーの基礎.pptx
+++ b/ゲーム科2年/01_後期/ゲームプログラミング応用Ⅰ/00_シェーダーの基礎.pptx
@@ -270,7 +270,7 @@
           <a:p>
             <a:fld id="{E9CC885B-4903-4D54-9A93-00025F12DED9}" type="datetimeFigureOut">
               <a:rPr kumimoji="1" lang="ja-JP" altLang="en-US" smtClean="0"/>
-              <a:t>2025/7/25</a:t>
+              <a:t>2025/7/28</a:t>
             </a:fld>
             <a:endParaRPr kumimoji="1" lang="ja-JP" altLang="en-US"/>
           </a:p>
@@ -500,7 +500,7 @@
           <a:p>
             <a:fld id="{E9CC885B-4903-4D54-9A93-00025F12DED9}" type="datetimeFigureOut">
               <a:rPr kumimoji="1" lang="ja-JP" altLang="en-US" smtClean="0"/>
-              <a:t>2025/7/25</a:t>
+              <a:t>2025/7/28</a:t>
             </a:fld>
             <a:endParaRPr kumimoji="1" lang="ja-JP" altLang="en-US"/>
           </a:p>
@@ -740,7 +740,7 @@
           <a:p>
             <a:fld id="{E9CC885B-4903-4D54-9A93-00025F12DED9}" type="datetimeFigureOut">
               <a:rPr kumimoji="1" lang="ja-JP" altLang="en-US" smtClean="0"/>
-              <a:t>2025/7/25</a:t>
+              <a:t>2025/7/28</a:t>
             </a:fld>
             <a:endParaRPr kumimoji="1" lang="ja-JP" altLang="en-US"/>
           </a:p>
@@ -970,7 +970,7 @@
           <a:p>
             <a:fld id="{E9CC885B-4903-4D54-9A93-00025F12DED9}" type="datetimeFigureOut">
               <a:rPr kumimoji="1" lang="ja-JP" altLang="en-US" smtClean="0"/>
-              <a:t>2025/7/25</a:t>
+              <a:t>2025/7/28</a:t>
             </a:fld>
             <a:endParaRPr kumimoji="1" lang="ja-JP" altLang="en-US"/>
           </a:p>
@@ -1245,7 +1245,7 @@
           <a:p>
             <a:fld id="{E9CC885B-4903-4D54-9A93-00025F12DED9}" type="datetimeFigureOut">
               <a:rPr kumimoji="1" lang="ja-JP" altLang="en-US" smtClean="0"/>
-              <a:t>2025/7/25</a:t>
+              <a:t>2025/7/28</a:t>
             </a:fld>
             <a:endParaRPr kumimoji="1" lang="ja-JP" altLang="en-US"/>
           </a:p>
@@ -1574,7 +1574,7 @@
           <a:p>
             <a:fld id="{E9CC885B-4903-4D54-9A93-00025F12DED9}" type="datetimeFigureOut">
               <a:rPr kumimoji="1" lang="ja-JP" altLang="en-US" smtClean="0"/>
-              <a:t>2025/7/25</a:t>
+              <a:t>2025/7/28</a:t>
             </a:fld>
             <a:endParaRPr kumimoji="1" lang="ja-JP" altLang="en-US"/>
           </a:p>
@@ -2050,7 +2050,7 @@
           <a:p>
             <a:fld id="{E9CC885B-4903-4D54-9A93-00025F12DED9}" type="datetimeFigureOut">
               <a:rPr kumimoji="1" lang="ja-JP" altLang="en-US" smtClean="0"/>
-              <a:t>2025/7/25</a:t>
+              <a:t>2025/7/28</a:t>
             </a:fld>
             <a:endParaRPr kumimoji="1" lang="ja-JP" altLang="en-US"/>
           </a:p>
@@ -2191,7 +2191,7 @@
           <a:p>
             <a:fld id="{E9CC885B-4903-4D54-9A93-00025F12DED9}" type="datetimeFigureOut">
               <a:rPr kumimoji="1" lang="ja-JP" altLang="en-US" smtClean="0"/>
-              <a:t>2025/7/25</a:t>
+              <a:t>2025/7/28</a:t>
             </a:fld>
             <a:endParaRPr kumimoji="1" lang="ja-JP" altLang="en-US"/>
           </a:p>
@@ -2304,7 +2304,7 @@
           <a:p>
             <a:fld id="{E9CC885B-4903-4D54-9A93-00025F12DED9}" type="datetimeFigureOut">
               <a:rPr kumimoji="1" lang="ja-JP" altLang="en-US" smtClean="0"/>
-              <a:t>2025/7/25</a:t>
+              <a:t>2025/7/28</a:t>
             </a:fld>
             <a:endParaRPr kumimoji="1" lang="ja-JP" altLang="en-US"/>
           </a:p>
@@ -2647,7 +2647,7 @@
           <a:p>
             <a:fld id="{E9CC885B-4903-4D54-9A93-00025F12DED9}" type="datetimeFigureOut">
               <a:rPr kumimoji="1" lang="ja-JP" altLang="en-US" smtClean="0"/>
-              <a:t>2025/7/25</a:t>
+              <a:t>2025/7/28</a:t>
             </a:fld>
             <a:endParaRPr kumimoji="1" lang="ja-JP" altLang="en-US"/>
           </a:p>
@@ -2935,7 +2935,7 @@
           <a:p>
             <a:fld id="{E9CC885B-4903-4D54-9A93-00025F12DED9}" type="datetimeFigureOut">
               <a:rPr kumimoji="1" lang="ja-JP" altLang="en-US" smtClean="0"/>
-              <a:t>2025/7/25</a:t>
+              <a:t>2025/7/28</a:t>
             </a:fld>
             <a:endParaRPr kumimoji="1" lang="ja-JP" altLang="en-US"/>
           </a:p>
@@ -3208,7 +3208,7 @@
           <a:p>
             <a:fld id="{E9CC885B-4903-4D54-9A93-00025F12DED9}" type="datetimeFigureOut">
               <a:rPr kumimoji="1" lang="ja-JP" altLang="en-US" smtClean="0"/>
-              <a:t>2025/7/25</a:t>
+              <a:t>2025/7/28</a:t>
             </a:fld>
             <a:endParaRPr kumimoji="1" lang="ja-JP" altLang="en-US"/>
           </a:p>
@@ -5724,7 +5724,7 @@
                   <a:srgbClr val="FF0000"/>
                 </a:solidFill>
               </a:rPr>
-              <a:t>この後に色を付けていきます。</a:t>
+              <a:t>この後、色を付けていきます。</a:t>
             </a:r>
             <a:endParaRPr lang="en-US" altLang="ja-JP" sz="2400" dirty="0"/>
           </a:p>

--- a/ゲーム科2年/01_後期/ゲームプログラミング応用Ⅰ/00_シェーダーの基礎.pptx
+++ b/ゲーム科2年/01_後期/ゲームプログラミング応用Ⅰ/00_シェーダーの基礎.pptx
@@ -5724,7 +5724,7 @@
                   <a:srgbClr val="FF0000"/>
                 </a:solidFill>
               </a:rPr>
-              <a:t>この後、色を付けていきます。</a:t>
+              <a:t>描画していきます。</a:t>
             </a:r>
             <a:endParaRPr lang="en-US" altLang="ja-JP" sz="2400" dirty="0"/>
           </a:p>
